--- a/02_簡報/01_中道森活_客群與定價簡報.pptx
+++ b/02_簡報/01_中道森活_客群與定價簡報.pptx
@@ -7527,7 +7527,7 @@
                 <a:latin typeface="Microsoft JhengHei"/>
                 <a:ea typeface="Microsoft JhengHei"/>
               </a:rPr>
-              <a:t>璞域品牌策略｜crazywofes@gmail.com</a:t>
+              <a:t>璞域品牌策略｜www.pure-branding.com</a:t>
             </a:r>
           </a:p>
         </p:txBody>
